--- a/.lessons/67 Frontend Add To Cart Feature/6 Add To Cart - Show cart products at cart page ( part - 1)/1.pptx
+++ b/.lessons/67 Frontend Add To Cart Feature/6 Add To Cart - Show cart products at cart page ( part - 1)/1.pptx
@@ -11,9 +11,9 @@
     <p:sldId id="423" r:id="rId5"/>
     <p:sldId id="422" r:id="rId6"/>
     <p:sldId id="416" r:id="rId7"/>
-    <p:sldId id="417" r:id="rId8"/>
-    <p:sldId id="418" r:id="rId9"/>
-    <p:sldId id="424" r:id="rId10"/>
+    <p:sldId id="424" r:id="rId8"/>
+    <p:sldId id="417" r:id="rId9"/>
+    <p:sldId id="418" r:id="rId10"/>
     <p:sldId id="425" r:id="rId11"/>
     <p:sldId id="419" r:id="rId12"/>
   </p:sldIdLst>
@@ -4195,6 +4195,122 @@
         <p:cNvPr id="1" name="">
           <a:extLst>
             <a:ext uri="{FF2B5EF4-FFF2-40B4-BE49-F238E27FC236}">
+              <a16:creationId xmlns:a16="http://schemas.microsoft.com/office/drawing/2014/main" id="{CD0D296E-EB98-D640-07A7-4A894C31D534}"/>
+            </a:ext>
+          </a:extLst>
+        </p:cNvPr>
+        <p:cNvGrpSpPr/>
+        <p:nvPr/>
+      </p:nvGrpSpPr>
+      <p:grpSpPr>
+        <a:xfrm>
+          <a:off x="0" y="0"/>
+          <a:ext cx="0" cy="0"/>
+          <a:chOff x="0" y="0"/>
+          <a:chExt cx="0" cy="0"/>
+        </a:xfrm>
+      </p:grpSpPr>
+      <p:sp>
+        <p:nvSpPr>
+          <p:cNvPr id="3" name="TextBox 2">
+            <a:extLst>
+              <a:ext uri="{FF2B5EF4-FFF2-40B4-BE49-F238E27FC236}">
+                <a16:creationId xmlns:a16="http://schemas.microsoft.com/office/drawing/2014/main" id="{7270D121-A1F7-14E4-7DE8-31BD253879D7}"/>
+              </a:ext>
+            </a:extLst>
+          </p:cNvPr>
+          <p:cNvSpPr txBox="1"/>
+          <p:nvPr/>
+        </p:nvSpPr>
+        <p:spPr>
+          <a:xfrm>
+            <a:off x="0" y="0"/>
+            <a:ext cx="12192000" cy="355354"/>
+          </a:xfrm>
+          <a:prstGeom prst="rect">
+            <a:avLst/>
+          </a:prstGeom>
+          <a:noFill/>
+        </p:spPr>
+        <p:txBody>
+          <a:bodyPr wrap="square">
+            <a:spAutoFit/>
+          </a:bodyPr>
+          <a:lstStyle/>
+          <a:p>
+            <a:pPr>
+              <a:lnSpc>
+                <a:spcPct val="150000"/>
+              </a:lnSpc>
+              <a:buNone/>
+            </a:pPr>
+            <a:r>
+              <a:rPr kumimoji="0" lang="en-US" altLang="en-US" sz="1300" b="0" i="0" u="none" strike="noStrike" cap="none" normalizeH="0" baseline="0">
+                <a:ln>
+                  <a:noFill/>
+                </a:ln>
+                <a:solidFill>
+                  <a:schemeClr val="tx1"/>
+                </a:solidFill>
+                <a:effectLst/>
+                <a:latin typeface="Arial" panose="020B0604020202020204" pitchFamily="34" charset="0"/>
+              </a:rPr>
+              <a:t>.</a:t>
+            </a:r>
+          </a:p>
+        </p:txBody>
+      </p:sp>
+      <p:pic>
+        <p:nvPicPr>
+          <p:cNvPr id="4" name="Picture 3">
+            <a:extLst>
+              <a:ext uri="{FF2B5EF4-FFF2-40B4-BE49-F238E27FC236}">
+                <a16:creationId xmlns:a16="http://schemas.microsoft.com/office/drawing/2014/main" id="{108A7F6A-ADF2-4681-7EF3-4633343FAA7B}"/>
+              </a:ext>
+            </a:extLst>
+          </p:cNvPr>
+          <p:cNvPicPr>
+            <a:picLocks noChangeAspect="1"/>
+          </p:cNvPicPr>
+          <p:nvPr/>
+        </p:nvPicPr>
+        <p:blipFill>
+          <a:blip r:embed="rId2"/>
+          <a:stretch>
+            <a:fillRect/>
+          </a:stretch>
+        </p:blipFill>
+        <p:spPr>
+          <a:xfrm>
+            <a:off x="1627803" y="0"/>
+            <a:ext cx="8936394" cy="6858000"/>
+          </a:xfrm>
+          <a:prstGeom prst="rect">
+            <a:avLst/>
+          </a:prstGeom>
+        </p:spPr>
+      </p:pic>
+    </p:spTree>
+    <p:extLst>
+      <p:ext uri="{BB962C8B-B14F-4D97-AF65-F5344CB8AC3E}">
+        <p14:creationId xmlns:p14="http://schemas.microsoft.com/office/powerpoint/2010/main" val="3514763244"/>
+      </p:ext>
+    </p:extLst>
+  </p:cSld>
+  <p:clrMapOvr>
+    <a:masterClrMapping/>
+  </p:clrMapOvr>
+</p:sld>
+</file>
+
+<file path=ppt/slides/slide8.xml><?xml version="1.0" encoding="utf-8"?>
+<p:sld xmlns:a="http://schemas.openxmlformats.org/drawingml/2006/main" xmlns:r="http://schemas.openxmlformats.org/officeDocument/2006/relationships" xmlns:p="http://schemas.openxmlformats.org/presentationml/2006/main">
+  <p:cSld>
+    <p:spTree>
+      <p:nvGrpSpPr>
+        <p:cNvPr id="1" name="">
+          <a:extLst>
+            <a:ext uri="{FF2B5EF4-FFF2-40B4-BE49-F238E27FC236}">
               <a16:creationId xmlns:a16="http://schemas.microsoft.com/office/drawing/2014/main" id="{FD2B7394-F255-C7DA-F333-43FC302D2917}"/>
             </a:ext>
           </a:extLst>
@@ -4303,7 +4419,7 @@
 </p:sld>
 </file>
 
-<file path=ppt/slides/slide8.xml><?xml version="1.0" encoding="utf-8"?>
+<file path=ppt/slides/slide9.xml><?xml version="1.0" encoding="utf-8"?>
 <p:sld xmlns:a="http://schemas.openxmlformats.org/drawingml/2006/main" xmlns:r="http://schemas.openxmlformats.org/officeDocument/2006/relationships" xmlns:p="http://schemas.openxmlformats.org/presentationml/2006/main">
   <p:cSld>
     <p:spTree>
@@ -4440,92 +4556,6 @@
     <p:extLst>
       <p:ext uri="{BB962C8B-B14F-4D97-AF65-F5344CB8AC3E}">
         <p14:creationId xmlns:p14="http://schemas.microsoft.com/office/powerpoint/2010/main" val="2155432070"/>
-      </p:ext>
-    </p:extLst>
-  </p:cSld>
-  <p:clrMapOvr>
-    <a:masterClrMapping/>
-  </p:clrMapOvr>
-</p:sld>
-</file>
-
-<file path=ppt/slides/slide9.xml><?xml version="1.0" encoding="utf-8"?>
-<p:sld xmlns:a="http://schemas.openxmlformats.org/drawingml/2006/main" xmlns:r="http://schemas.openxmlformats.org/officeDocument/2006/relationships" xmlns:p="http://schemas.openxmlformats.org/presentationml/2006/main">
-  <p:cSld>
-    <p:spTree>
-      <p:nvGrpSpPr>
-        <p:cNvPr id="1" name="">
-          <a:extLst>
-            <a:ext uri="{FF2B5EF4-FFF2-40B4-BE49-F238E27FC236}">
-              <a16:creationId xmlns:a16="http://schemas.microsoft.com/office/drawing/2014/main" id="{CD0D296E-EB98-D640-07A7-4A894C31D534}"/>
-            </a:ext>
-          </a:extLst>
-        </p:cNvPr>
-        <p:cNvGrpSpPr/>
-        <p:nvPr/>
-      </p:nvGrpSpPr>
-      <p:grpSpPr>
-        <a:xfrm>
-          <a:off x="0" y="0"/>
-          <a:ext cx="0" cy="0"/>
-          <a:chOff x="0" y="0"/>
-          <a:chExt cx="0" cy="0"/>
-        </a:xfrm>
-      </p:grpSpPr>
-      <p:sp>
-        <p:nvSpPr>
-          <p:cNvPr id="3" name="TextBox 2">
-            <a:extLst>
-              <a:ext uri="{FF2B5EF4-FFF2-40B4-BE49-F238E27FC236}">
-                <a16:creationId xmlns:a16="http://schemas.microsoft.com/office/drawing/2014/main" id="{7270D121-A1F7-14E4-7DE8-31BD253879D7}"/>
-              </a:ext>
-            </a:extLst>
-          </p:cNvPr>
-          <p:cNvSpPr txBox="1"/>
-          <p:nvPr/>
-        </p:nvSpPr>
-        <p:spPr>
-          <a:xfrm>
-            <a:off x="0" y="0"/>
-            <a:ext cx="12192000" cy="355354"/>
-          </a:xfrm>
-          <a:prstGeom prst="rect">
-            <a:avLst/>
-          </a:prstGeom>
-          <a:noFill/>
-        </p:spPr>
-        <p:txBody>
-          <a:bodyPr wrap="square">
-            <a:spAutoFit/>
-          </a:bodyPr>
-          <a:lstStyle/>
-          <a:p>
-            <a:pPr>
-              <a:lnSpc>
-                <a:spcPct val="150000"/>
-              </a:lnSpc>
-              <a:buNone/>
-            </a:pPr>
-            <a:r>
-              <a:rPr kumimoji="0" lang="en-US" altLang="en-US" sz="1300" b="0" i="0" u="none" strike="noStrike" cap="none" normalizeH="0" baseline="0">
-                <a:ln>
-                  <a:noFill/>
-                </a:ln>
-                <a:solidFill>
-                  <a:schemeClr val="tx1"/>
-                </a:solidFill>
-                <a:effectLst/>
-                <a:latin typeface="Arial" panose="020B0604020202020204" pitchFamily="34" charset="0"/>
-              </a:rPr>
-              <a:t>.</a:t>
-            </a:r>
-          </a:p>
-        </p:txBody>
-      </p:sp>
-    </p:spTree>
-    <p:extLst>
-      <p:ext uri="{BB962C8B-B14F-4D97-AF65-F5344CB8AC3E}">
-        <p14:creationId xmlns:p14="http://schemas.microsoft.com/office/powerpoint/2010/main" val="3514763244"/>
       </p:ext>
     </p:extLst>
   </p:cSld>
